--- a/courses/ooad/sessions/s05.pptx
+++ b/courses/ooad/sessions/s05.pptx
@@ -662,7 +662,7 @@
             <a:pPr lvl="0"/>
             <a:r>
               <a:rPr lang="ko-KR" sz="1200"/>
-              <a:t>외부 시스템 목록과 동기·비동기는 과정의 공통 전제와 같다("02. 요구 분석과 유스케이스"의 「43. 정제된 SSD」). 동기·비동기의 기준은 반환값이 아니라 완료를 기다리는가다("04. 동적 모델 — 상호작용과 상태"의 「51. 동적 모델에서 코드로」).</a:t>
+              <a:t>외부 시스템 목록과 동기·비동기는 과정의 공통 전제와 같다("02. 요구 분석과 유스케이스"의 「44. 정제된 SSD」). 동기·비동기의 기준은 반환값이 아니라 완료를 기다리는가다("04. 동적 모델 — 상호작용과 상태"의 「51. 동적 모델에서 코드로」).</a:t>
             </a:r>
           </a:p>
           <a:p>
@@ -4986,27 +4986,6 @@
             <a:normAutofit/>
           </a:bodyPr>
           <a:lstStyle/>
-          <a:p>
-            <a:pPr marL="0" indent="0">
-              <a:spcBef>
-                <a:spcPts val="0"/>
-              </a:spcBef>
-              <a:spcAft>
-                <a:spcPts val="600"/>
-              </a:spcAft>
-              <a:buNone/>
-            </a:pPr>
-            <a:r>
-              <a:rPr sz="1800" b="0" i="1">
-                <a:solidFill>
-                  <a:srgbClr val="000000"/>
-                </a:solidFill>
-                <a:latin typeface="맑은 고딕"/>
-                <a:ea typeface="맑은 고딕"/>
-              </a:rPr>
-              <a:t>클래스를 패키지로 나누는 기준은 다섯 가지 질문이다. 각 질문의 단서는 앞 세션의 모델에 이미 있다.</a:t>
-            </a:r>
-          </a:p>
           <a:p>
             <a:pPr lvl="2" marL="723900" indent="-368300">
               <a:spcBef>
@@ -7381,27 +7360,6 @@
           </a:bodyPr>
           <a:lstStyle/>
           <a:p>
-            <a:pPr marL="0" indent="0">
-              <a:spcBef>
-                <a:spcPts val="0"/>
-              </a:spcBef>
-              <a:spcAft>
-                <a:spcPts val="600"/>
-              </a:spcAft>
-              <a:buNone/>
-            </a:pPr>
-            <a:r>
-              <a:rPr sz="1800" b="0" i="1">
-                <a:solidFill>
-                  <a:srgbClr val="000000"/>
-                </a:solidFill>
-                <a:latin typeface="맑은 고딕"/>
-                <a:ea typeface="맑은 고딕"/>
-              </a:rPr>
-              <a:t>주문 시스템은 외부 시스템 넷과 요청과 통보를 주고받는다.</a:t>
-            </a:r>
-          </a:p>
-          <a:p>
             <a:pPr lvl="2" marL="723900" indent="-368300">
               <a:spcBef>
                 <a:spcPts val="600"/>
@@ -9592,27 +9550,6 @@
             <a:normAutofit/>
           </a:bodyPr>
           <a:lstStyle/>
-          <a:p>
-            <a:pPr marL="0" indent="0">
-              <a:spcBef>
-                <a:spcPts val="0"/>
-              </a:spcBef>
-              <a:spcAft>
-                <a:spcPts val="600"/>
-              </a:spcAft>
-              <a:buNone/>
-            </a:pPr>
-            <a:r>
-              <a:rPr sz="1800" b="0" i="1">
-                <a:solidFill>
-                  <a:srgbClr val="000000"/>
-                </a:solidFill>
-                <a:latin typeface="맑은 고딕"/>
-                <a:ea typeface="맑은 고딕"/>
-              </a:rPr>
-              <a:t>순환 의존은 서로가 서로를 알아 따로 바꾸거나 시험할 수 없는 상태다.</a:t>
-            </a:r>
-          </a:p>
           <a:p>
             <a:pPr lvl="2" marL="723900" indent="-368300">
               <a:spcBef>
@@ -12941,27 +12878,6 @@
           </a:bodyPr>
           <a:lstStyle/>
           <a:p>
-            <a:pPr marL="0" indent="0">
-              <a:spcBef>
-                <a:spcPts val="0"/>
-              </a:spcBef>
-              <a:spcAft>
-                <a:spcPts val="600"/>
-              </a:spcAft>
-              <a:buNone/>
-            </a:pPr>
-            <a:r>
-              <a:rPr sz="1800" b="0" i="1">
-                <a:solidFill>
-                  <a:srgbClr val="000000"/>
-                </a:solidFill>
-                <a:latin typeface="맑은 고딕"/>
-                <a:ea typeface="맑은 고딕"/>
-              </a:rPr>
-              <a:t>Robert C. Martin은 패키지를 묶는 응집 원칙 셋과 패키지 사이의 결합 원칙 셋을 정리했다.</a:t>
-            </a:r>
-          </a:p>
-          <a:p>
             <a:pPr lvl="2" marL="723900" indent="-368300">
               <a:spcBef>
                 <a:spcPts val="600"/>
@@ -15348,27 +15264,6 @@
             <a:normAutofit/>
           </a:bodyPr>
           <a:lstStyle/>
-          <a:p>
-            <a:pPr marL="0" indent="0">
-              <a:spcBef>
-                <a:spcPts val="0"/>
-              </a:spcBef>
-              <a:spcAft>
-                <a:spcPts val="600"/>
-              </a:spcAft>
-              <a:buNone/>
-            </a:pPr>
-            <a:r>
-              <a:rPr sz="1800" b="0" i="1">
-                <a:solidFill>
-                  <a:srgbClr val="000000"/>
-                </a:solidFill>
-                <a:latin typeface="맑은 고딕"/>
-                <a:ea typeface="맑은 고딕"/>
-              </a:rPr>
-              <a:t>결합도는 경계 사이가 얼마나 기대는가, 응집도는 경계 안이 한 이유로 모였는가다.</a:t>
-            </a:r>
-          </a:p>
           <a:p>
             <a:pPr lvl="2" marL="723900" indent="-368300">
               <a:spcBef>

--- a/courses/ooad/sessions/s05.pptx
+++ b/courses/ooad/sessions/s05.pptx
@@ -573,7 +573,7 @@
             <a:pPr lvl="0"/>
             <a:r>
               <a:rPr lang="ko-KR" sz="1200"/>
-              <a:t>근거: "03. 정적 모델 — 도메인 개념과 관계"의 「45. 도메인 모델 — 상세화」·「48. 도메인 모델 — 패키지별」, "04. 동적 모델 — 상호작용과 상태"의 「33. 주문 상태 기계」.</a:t>
+              <a:t>근거: "03. 정적 모델 — 도메인 개념과 관계"의 「상세화」·「패키지별 도메인 모델」, "04. 동적 모델 — 상호작용과 상태"의 「08. 상태 기계 다이어그램」의 「주문 상태 기계」.</a:t>
             </a:r>
           </a:p>
           <a:p>
@@ -662,7 +662,7 @@
             <a:pPr lvl="0"/>
             <a:r>
               <a:rPr lang="ko-KR" sz="1200"/>
-              <a:t>외부 시스템 목록과 동기·비동기는 과정의 공통 전제와 같다("02. 요구 분석과 유스케이스"의 「44. 정제된 SSD」). 동기·비동기의 기준은 반환값이 아니라 완료를 기다리는가다("04. 동적 모델 — 상호작용과 상태"의 「51. 동적 모델에서 코드로」).</a:t>
+              <a:t>외부 시스템 목록과 동기·비동기는 과정의 공통 전제와 같다("02. 요구 분석과 유스케이스"의 「44. 정제된 SSD」). 동기·비동기의 기준은 반환값이 아니라 완료를 기다리는가다("04. 동적 모델 — 상호작용과 상태"의 「12. 동적 모델에서 코드로」).</a:t>
             </a:r>
           </a:p>
           <a:p>
@@ -1269,7 +1269,7 @@
             <a:pPr lvl="0"/>
             <a:r>
               <a:rPr lang="ko-KR" sz="1200"/>
-              <a:t>결제 전 취소는 "04. 동적 모델 — 상호작용과 상태"의 「35. 가드와 금지된 전이」에서 미정으로 남긴 요구다. 정해지면 주문 경계 안에서 끝난다.</a:t>
+              <a:t>결제 전 취소는 "04. 동적 모델 — 상호작용과 상태"의 「08. 상태 기계 다이어그램」의 「가드와 금지된 전이」에서 미정으로 남긴 요구다. 정해지면 주문 경계 안에서 끝난다.</a:t>
             </a:r>
           </a:p>
           <a:p>
@@ -2317,7 +2317,7 @@
             <a:pPr lvl="0"/>
             <a:r>
               <a:rPr lang="ko-KR" sz="1200"/>
-              <a:t>도식은 "03. 정적 모델 — 도메인 개념과 관계"의 「48. 도메인 모델 — 패키지별」을 경계를 넘는 연관만 남겨 줄인 것이다(장바구니 항목·환불은 생략). 분석 패키지의 기준(주제 영역·클래스 계층·유스케이스·강한 연관)은 "03. 정적 모델 — 도메인 개념과 관계"의 「47. 패키지 기준」에서 다뤘다.</a:t>
+              <a:t>도식은 "03. 정적 모델 — 도메인 개념과 관계"의 「15. 패키지」의 「패키지별 도메인 모델」을 경계를 넘는 연관만 남겨 줄인 것이다(장바구니 항목·환불은 생략). 분석 패키지의 기준(주제 영역·클래스 계층·유스케이스·강한 연관)은 "03. 정적 모델 — 도메인 개념과 관계"의 「15. 패키지」의 「패키지 기준」에서 다뤘다.</a:t>
             </a:r>
           </a:p>
           <a:p>
@@ -2399,7 +2399,7 @@
             <a:pPr lvl="0"/>
             <a:r>
               <a:rPr lang="ko-KR" sz="1200"/>
-              <a:t>"01. OOAD 개요"의 「21. 책임과 경계」에서 경계를 "함께 변경되어야 할 상태와 행위의 묶음"으로 미리 보였다. 이 세션은 그것을 주문 시스템에 적용한다.</a:t>
+              <a:t>"01. OOAD 개요"의 「취소 판단의 책임」에서 경계를 "함께 변경되어야 할 상태와 행위의 묶음"으로 미리 보였다. 이 세션은 그것을 주문 시스템에 적용한다.</a:t>
             </a:r>
           </a:p>
           <a:p>
@@ -2542,7 +2542,7 @@
             <a:pPr lvl="0"/>
             <a:r>
               <a:rPr lang="ko-KR" sz="1200"/>
-              <a:t>용어집과 영문명은 "02. 요구 분석과 유스케이스"의 「18. 용어집」에서 정의하고 "03. 정적 모델 — 도메인 개념과 관계"의 「42. 용어집 정제」에서 정제했다. 전체 목록과 명명 규칙은 과정 설계의 "영한 용어집과 명명 규칙"이 원천이다.</a:t>
+              <a:t>용어집과 영문명은 "02. 요구 분석과 유스케이스"의 「18. 용어집」에서 정의하고 "03. 정적 모델 — 도메인 개념과 관계"의 「13. 용어 정렬」의 「용어집 정제」에서 정제했다. 전체 목록과 명명 규칙은 과정 설계의 "영한 용어집과 명명 규칙"이 원천이다.</a:t>
             </a:r>
           </a:p>
           <a:p>
@@ -2631,7 +2631,7 @@
             <a:pPr lvl="0"/>
             <a:r>
               <a:rPr lang="ko-KR" sz="1200"/>
-              <a:t>"03. 정적 모델 — 도메인 개념과 관계"의 「46. 개념의 묶음 — 패키지」는 개념의 묶음까지 다뤘다. 이 세션은 의존 화살표와 인터페이스를 더한다.</a:t>
+              <a:t>"03. 정적 모델 — 도메인 개념과 관계"의 「15. 패키지」의 「패키지 표기」는 개념의 묶음까지 다뤘다. 이 세션은 의존 화살표와 인터페이스를 더한다.</a:t>
             </a:r>
           </a:p>
         </p:txBody>
@@ -4280,6 +4280,48 @@
               <a:t>15. 패키지 원칙</a:t>
             </a:r>
           </a:p>
+          <a:p>
+            <a:pPr lvl="1" marL="355600" indent="0">
+              <a:spcBef>
+                <a:spcPts val="300"/>
+              </a:spcBef>
+              <a:spcAft>
+                <a:spcPts val="300"/>
+              </a:spcAft>
+              <a:buNone/>
+            </a:pPr>
+            <a:r>
+              <a:rPr sz="1600" b="0">
+                <a:solidFill>
+                  <a:srgbClr val="000000"/>
+                </a:solidFill>
+                <a:latin typeface="맑은 고딕"/>
+                <a:ea typeface="맑은 고딕"/>
+              </a:rPr>
+              <a:t>16. 구조의 진화</a:t>
+            </a:r>
+          </a:p>
+          <a:p>
+            <a:pPr lvl="1" marL="355600" indent="0">
+              <a:spcBef>
+                <a:spcPts val="300"/>
+              </a:spcBef>
+              <a:spcAft>
+                <a:spcPts val="300"/>
+              </a:spcAft>
+              <a:buNone/>
+            </a:pPr>
+            <a:r>
+              <a:rPr sz="1600" b="0">
+                <a:solidFill>
+                  <a:srgbClr val="000000"/>
+                </a:solidFill>
+                <a:latin typeface="맑은 고딕"/>
+                <a:ea typeface="맑은 고딕"/>
+              </a:rPr>
+              <a:t>17. 변경 파급</a:t>
+            </a:r>
+          </a:p>
         </p:txBody>
       </p:sp>
       <p:sp>
@@ -4384,48 +4426,6 @@
             <a:normAutofit/>
           </a:bodyPr>
           <a:lstStyle/>
-          <a:p>
-            <a:pPr lvl="1" marL="355600" indent="0">
-              <a:spcBef>
-                <a:spcPts val="300"/>
-              </a:spcBef>
-              <a:spcAft>
-                <a:spcPts val="300"/>
-              </a:spcAft>
-              <a:buNone/>
-            </a:pPr>
-            <a:r>
-              <a:rPr sz="1600" b="0">
-                <a:solidFill>
-                  <a:srgbClr val="000000"/>
-                </a:solidFill>
-                <a:latin typeface="맑은 고딕"/>
-                <a:ea typeface="맑은 고딕"/>
-              </a:rPr>
-              <a:t>16. 구조의 진화</a:t>
-            </a:r>
-          </a:p>
-          <a:p>
-            <a:pPr lvl="1" marL="355600" indent="0">
-              <a:spcBef>
-                <a:spcPts val="300"/>
-              </a:spcBef>
-              <a:spcAft>
-                <a:spcPts val="300"/>
-              </a:spcAft>
-              <a:buNone/>
-            </a:pPr>
-            <a:r>
-              <a:rPr sz="1600" b="0">
-                <a:solidFill>
-                  <a:srgbClr val="000000"/>
-                </a:solidFill>
-                <a:latin typeface="맑은 고딕"/>
-                <a:ea typeface="맑은 고딕"/>
-              </a:rPr>
-              <a:t>17. 변경 파급</a:t>
-            </a:r>
-          </a:p>
           <a:p>
             <a:pPr lvl="1" marL="355600" indent="0">
               <a:spcBef>
@@ -22703,7 +22703,7 @@
         <p:spPr>
           <a:xfrm>
             <a:off x="233172" y="1414318"/>
-            <a:ext cx="4338828" cy="5068778"/>
+            <a:ext cx="4338828" cy="4898147"/>
           </a:xfrm>
         </p:spPr>
         <p:txBody>
@@ -22961,7 +22961,7 @@
         <p:spPr>
           <a:xfrm>
             <a:off x="4572000" y="1414318"/>
-            <a:ext cx="4439412" cy="5068778"/>
+            <a:ext cx="4439412" cy="4898147"/>
           </a:xfrm>
         </p:spPr>
         <p:txBody>

--- a/courses/ooad/sessions/s05.pptx
+++ b/courses/ooad/sessions/s05.pptx
@@ -5521,8 +5521,8 @@
         </p:nvSpPr>
         <p:spPr>
           <a:xfrm>
-            <a:off x="365760" y="3386298"/>
-            <a:ext cx="8412480" cy="274320"/>
+            <a:off x="365760" y="2862072"/>
+            <a:ext cx="8412480" cy="201168"/>
           </a:xfrm>
           <a:prstGeom prst="rect">
             <a:avLst/>
@@ -5565,7 +5565,7 @@
         </p:blipFill>
         <p:spPr>
           <a:xfrm>
-            <a:off x="2344615" y="3660618"/>
+            <a:off x="2344615" y="3099816"/>
             <a:ext cx="4454769" cy="2676769"/>
           </a:xfrm>
           <a:prstGeom prst="rect">
@@ -5752,7 +5752,7 @@
           </p:nvPr>
         </p:nvGraphicFramePr>
         <p:xfrm>
-          <a:off x="1649286" y="1884410"/>
+          <a:off x="1649286" y="1837690"/>
           <a:ext cx="5831840" cy="3873500"/>
         </p:xfrm>
         <a:graphic>
@@ -6793,7 +6793,7 @@
         </p:nvSpPr>
         <p:spPr>
           <a:xfrm>
-            <a:off x="365760" y="1585960"/>
+            <a:off x="365760" y="1539240"/>
             <a:ext cx="8412480" cy="222250"/>
           </a:xfrm>
           <a:prstGeom prst="rect">
@@ -7350,8 +7350,8 @@
         </p:nvSpPr>
         <p:spPr>
           <a:xfrm>
-            <a:off x="365760" y="3329539"/>
-            <a:ext cx="8412480" cy="274320"/>
+            <a:off x="365760" y="2511552"/>
+            <a:ext cx="8412480" cy="201168"/>
           </a:xfrm>
           <a:prstGeom prst="rect">
             <a:avLst/>
@@ -7394,7 +7394,7 @@
         </p:blipFill>
         <p:spPr>
           <a:xfrm>
-            <a:off x="2359269" y="3603859"/>
+            <a:off x="2359269" y="2749296"/>
             <a:ext cx="4425462" cy="2315308"/>
           </a:xfrm>
           <a:prstGeom prst="rect">
@@ -7835,8 +7835,8 @@
         </p:nvSpPr>
         <p:spPr>
           <a:xfrm>
-            <a:off x="365760" y="3753865"/>
-            <a:ext cx="8412480" cy="274320"/>
+            <a:off x="365760" y="2862072"/>
+            <a:ext cx="8412480" cy="201168"/>
           </a:xfrm>
           <a:prstGeom prst="rect">
             <a:avLst/>
@@ -7879,7 +7879,7 @@
         </p:blipFill>
         <p:spPr>
           <a:xfrm>
-            <a:off x="2476500" y="4028185"/>
+            <a:off x="2476500" y="3099816"/>
             <a:ext cx="4191000" cy="1941635"/>
           </a:xfrm>
           <a:prstGeom prst="rect">
@@ -9571,8 +9571,8 @@
         </p:nvSpPr>
         <p:spPr>
           <a:xfrm>
-            <a:off x="365760" y="3500500"/>
-            <a:ext cx="8412480" cy="274320"/>
+            <a:off x="365760" y="2511552"/>
+            <a:ext cx="8412480" cy="201168"/>
           </a:xfrm>
           <a:prstGeom prst="rect">
             <a:avLst/>
@@ -9615,7 +9615,7 @@
         </p:blipFill>
         <p:spPr>
           <a:xfrm>
-            <a:off x="1768231" y="3774820"/>
+            <a:off x="1768231" y="2749296"/>
             <a:ext cx="5607538" cy="1973385"/>
           </a:xfrm>
           <a:prstGeom prst="rect">
@@ -10116,8 +10116,8 @@
         </p:nvSpPr>
         <p:spPr>
           <a:xfrm>
-            <a:off x="365760" y="3462449"/>
-            <a:ext cx="8412480" cy="274320"/>
+            <a:off x="365760" y="3024170"/>
+            <a:ext cx="8412480" cy="201168"/>
           </a:xfrm>
           <a:prstGeom prst="rect">
             <a:avLst/>
@@ -10160,8 +10160,8 @@
         </p:blipFill>
         <p:spPr>
           <a:xfrm>
-            <a:off x="2713725" y="3736769"/>
-            <a:ext cx="3716551" cy="2639704"/>
+            <a:off x="2667000" y="3261914"/>
+            <a:ext cx="3810000" cy="2706077"/>
           </a:xfrm>
           <a:prstGeom prst="rect">
             <a:avLst/>
@@ -10337,7 +10337,7 @@
           </p:nvPr>
         </p:nvGraphicFramePr>
         <p:xfrm>
-          <a:off x="412306" y="2141448"/>
+          <a:off x="412306" y="2112010"/>
           <a:ext cx="8305800" cy="3873500"/>
         </p:xfrm>
         <a:graphic>
@@ -11734,7 +11734,7 @@
         </p:nvSpPr>
         <p:spPr>
           <a:xfrm>
-            <a:off x="365760" y="1842998"/>
+            <a:off x="365760" y="1813560"/>
             <a:ext cx="8412480" cy="222250"/>
           </a:xfrm>
           <a:prstGeom prst="rect">
@@ -11783,7 +11783,7 @@
         </p:nvSpPr>
         <p:spPr>
           <a:xfrm>
-            <a:off x="365760" y="4259048"/>
+            <a:off x="365760" y="4356610"/>
             <a:ext cx="8412480" cy="1435556"/>
           </a:xfrm>
           <a:prstGeom prst="rect">
@@ -13250,7 +13250,7 @@
           </p:nvPr>
         </p:nvGraphicFramePr>
         <p:xfrm>
-          <a:off x="1788986" y="3590206"/>
+          <a:off x="1788986" y="3437890"/>
           <a:ext cx="5552440" cy="3873500"/>
         </p:xfrm>
         <a:graphic>
@@ -14490,7 +14490,7 @@
         </p:nvSpPr>
         <p:spPr>
           <a:xfrm>
-            <a:off x="365760" y="3291756"/>
+            <a:off x="365760" y="3139440"/>
             <a:ext cx="8412480" cy="222250"/>
           </a:xfrm>
           <a:prstGeom prst="rect">
@@ -15017,8 +15017,8 @@
         </p:nvSpPr>
         <p:spPr>
           <a:xfrm>
-            <a:off x="365760" y="3173231"/>
-            <a:ext cx="8412480" cy="274320"/>
+            <a:off x="365760" y="2511552"/>
+            <a:ext cx="8412480" cy="201168"/>
           </a:xfrm>
           <a:prstGeom prst="rect">
             <a:avLst/>
@@ -15061,7 +15061,7 @@
         </p:blipFill>
         <p:spPr>
           <a:xfrm>
-            <a:off x="3048000" y="3447551"/>
+            <a:off x="3048000" y="2749296"/>
             <a:ext cx="3048000" cy="2627923"/>
           </a:xfrm>
           <a:prstGeom prst="rect">
@@ -15864,7 +15864,7 @@
         </p:nvSpPr>
         <p:spPr>
           <a:xfrm>
-            <a:off x="365760" y="3587235"/>
+            <a:off x="365760" y="3623811"/>
             <a:ext cx="8412480" cy="1155700"/>
           </a:xfrm>
           <a:prstGeom prst="rect">
@@ -16197,7 +16197,7 @@
         </p:nvSpPr>
         <p:spPr>
           <a:xfrm>
-            <a:off x="365760" y="4852663"/>
+            <a:off x="365760" y="4889239"/>
             <a:ext cx="8412480" cy="1651000"/>
           </a:xfrm>
           <a:prstGeom prst="rect">
@@ -16442,8 +16442,8 @@
         </p:nvSpPr>
         <p:spPr>
           <a:xfrm>
-            <a:off x="365760" y="1842998"/>
-            <a:ext cx="8412480" cy="274320"/>
+            <a:off x="365760" y="1916150"/>
+            <a:ext cx="8412480" cy="201168"/>
           </a:xfrm>
           <a:prstGeom prst="rect">
             <a:avLst/>
@@ -16493,7 +16493,7 @@
         </p:blipFill>
         <p:spPr>
           <a:xfrm>
-            <a:off x="3145692" y="2117318"/>
+            <a:off x="3145692" y="2153894"/>
             <a:ext cx="2852615" cy="1250462"/>
           </a:xfrm>
           <a:prstGeom prst="rect">
@@ -16710,7 +16710,7 @@
         </p:nvSpPr>
         <p:spPr>
           <a:xfrm>
-            <a:off x="365760" y="3777735"/>
+            <a:off x="365760" y="3814311"/>
             <a:ext cx="8412480" cy="2880360"/>
           </a:xfrm>
           <a:prstGeom prst="rect">
@@ -17269,8 +17269,8 @@
         </p:nvSpPr>
         <p:spPr>
           <a:xfrm>
-            <a:off x="365760" y="1842998"/>
-            <a:ext cx="8412480" cy="274320"/>
+            <a:off x="365760" y="1916150"/>
+            <a:ext cx="8412480" cy="201168"/>
           </a:xfrm>
           <a:prstGeom prst="rect">
             <a:avLst/>
@@ -17320,7 +17320,7 @@
         </p:blipFill>
         <p:spPr>
           <a:xfrm>
-            <a:off x="3283683" y="2117318"/>
+            <a:off x="3283683" y="2153894"/>
             <a:ext cx="2576635" cy="1440962"/>
           </a:xfrm>
           <a:prstGeom prst="rect">
@@ -17537,7 +17537,7 @@
         </p:nvSpPr>
         <p:spPr>
           <a:xfrm>
-            <a:off x="365760" y="3792389"/>
+            <a:off x="365760" y="3828965"/>
             <a:ext cx="8412480" cy="990600"/>
           </a:xfrm>
           <a:prstGeom prst="rect">
@@ -17846,8 +17846,8 @@
         </p:nvSpPr>
         <p:spPr>
           <a:xfrm>
-            <a:off x="365760" y="1842998"/>
-            <a:ext cx="8412480" cy="274320"/>
+            <a:off x="365760" y="1916150"/>
+            <a:ext cx="8412480" cy="201168"/>
           </a:xfrm>
           <a:prstGeom prst="rect">
             <a:avLst/>
@@ -17897,7 +17897,7 @@
         </p:blipFill>
         <p:spPr>
           <a:xfrm>
-            <a:off x="2443529" y="2117318"/>
+            <a:off x="2443529" y="2153894"/>
             <a:ext cx="4256942" cy="1455615"/>
           </a:xfrm>
           <a:prstGeom prst="rect">
@@ -18373,8 +18373,8 @@
         </p:nvSpPr>
         <p:spPr>
           <a:xfrm>
-            <a:off x="365760" y="3648211"/>
-            <a:ext cx="8412480" cy="274320"/>
+            <a:off x="365760" y="3212592"/>
+            <a:ext cx="8412480" cy="201168"/>
           </a:xfrm>
           <a:prstGeom prst="rect">
             <a:avLst/>
@@ -18417,8 +18417,8 @@
         </p:blipFill>
         <p:spPr>
           <a:xfrm>
-            <a:off x="3112406" y="3922531"/>
-            <a:ext cx="2919188" cy="2453942"/>
+            <a:off x="3008923" y="3450336"/>
+            <a:ext cx="3126154" cy="2627923"/>
           </a:xfrm>
           <a:prstGeom prst="rect">
             <a:avLst/>
@@ -18923,8 +18923,8 @@
         </p:nvSpPr>
         <p:spPr>
           <a:xfrm>
-            <a:off x="365760" y="4009673"/>
-            <a:ext cx="8412480" cy="274320"/>
+            <a:off x="365760" y="3212592"/>
+            <a:ext cx="8412480" cy="201168"/>
           </a:xfrm>
           <a:prstGeom prst="rect">
             <a:avLst/>
@@ -18967,7 +18967,7 @@
         </p:blipFill>
         <p:spPr>
           <a:xfrm>
-            <a:off x="2149231" y="4283993"/>
+            <a:off x="2149231" y="3450336"/>
             <a:ext cx="4845538" cy="1905000"/>
           </a:xfrm>
           <a:prstGeom prst="rect">
@@ -19420,8 +19420,8 @@
         </p:nvSpPr>
         <p:spPr>
           <a:xfrm>
-            <a:off x="365760" y="3489168"/>
-            <a:ext cx="8412480" cy="274320"/>
+            <a:off x="365760" y="3136392"/>
+            <a:ext cx="8412480" cy="201168"/>
           </a:xfrm>
           <a:prstGeom prst="rect">
             <a:avLst/>
@@ -19464,8 +19464,8 @@
         </p:blipFill>
         <p:spPr>
           <a:xfrm>
-            <a:off x="2868598" y="3763488"/>
-            <a:ext cx="3406803" cy="2612985"/>
+            <a:off x="2614780" y="3374136"/>
+            <a:ext cx="3914439" cy="3002337"/>
           </a:xfrm>
           <a:prstGeom prst="rect">
             <a:avLst/>
@@ -19905,8 +19905,8 @@
         </p:nvSpPr>
         <p:spPr>
           <a:xfrm>
-            <a:off x="365760" y="3374514"/>
-            <a:ext cx="8412480" cy="274320"/>
+            <a:off x="365760" y="2862072"/>
+            <a:ext cx="8412480" cy="201168"/>
           </a:xfrm>
           <a:prstGeom prst="rect">
             <a:avLst/>
@@ -19949,7 +19949,7 @@
         </p:blipFill>
         <p:spPr>
           <a:xfrm>
-            <a:off x="3649663" y="3648834"/>
+            <a:off x="3649663" y="3099816"/>
             <a:ext cx="1844675" cy="2700338"/>
           </a:xfrm>
           <a:prstGeom prst="rect">
@@ -22508,8 +22508,8 @@
         </p:nvSpPr>
         <p:spPr>
           <a:xfrm>
-            <a:off x="365760" y="2539393"/>
-            <a:ext cx="8412480" cy="274320"/>
+            <a:off x="365760" y="2125854"/>
+            <a:ext cx="8412480" cy="201168"/>
           </a:xfrm>
           <a:prstGeom prst="rect">
             <a:avLst/>
@@ -22552,8 +22552,8 @@
         </p:blipFill>
         <p:spPr>
           <a:xfrm>
-            <a:off x="1921241" y="2813713"/>
-            <a:ext cx="5301517" cy="3545742"/>
+            <a:off x="1572018" y="2363598"/>
+            <a:ext cx="5999965" cy="4012875"/>
           </a:xfrm>
           <a:prstGeom prst="rect">
             <a:avLst/>
@@ -22952,8 +22952,8 @@
         </p:nvSpPr>
         <p:spPr>
           <a:xfrm>
-            <a:off x="365760" y="1848782"/>
-            <a:ext cx="8412480" cy="274320"/>
+            <a:off x="365760" y="1694112"/>
+            <a:ext cx="8412480" cy="201168"/>
           </a:xfrm>
           <a:prstGeom prst="rect">
             <a:avLst/>
@@ -22996,8 +22996,8 @@
         </p:blipFill>
         <p:spPr>
           <a:xfrm>
-            <a:off x="1732608" y="2123102"/>
-            <a:ext cx="5678783" cy="4253371"/>
+            <a:off x="1660769" y="1931856"/>
+            <a:ext cx="5822462" cy="4360985"/>
           </a:xfrm>
           <a:prstGeom prst="rect">
             <a:avLst/>
@@ -24134,7 +24134,7 @@
           </p:nvPr>
         </p:nvGraphicFramePr>
         <p:xfrm>
-          <a:off x="2389696" y="4817846"/>
+          <a:off x="2389696" y="4951984"/>
           <a:ext cx="4351020" cy="3873500"/>
         </p:xfrm>
         <a:graphic>
@@ -25007,7 +25007,7 @@
         </p:nvSpPr>
         <p:spPr>
           <a:xfrm>
-            <a:off x="365760" y="4519396"/>
+            <a:off x="365760" y="4653534"/>
             <a:ext cx="8412480" cy="222250"/>
           </a:xfrm>
           <a:prstGeom prst="rect">
@@ -25056,8 +25056,8 @@
         </p:nvSpPr>
         <p:spPr>
           <a:xfrm>
-            <a:off x="365760" y="1842998"/>
-            <a:ext cx="8412480" cy="274320"/>
+            <a:off x="365760" y="1886712"/>
+            <a:ext cx="8412480" cy="201168"/>
           </a:xfrm>
           <a:prstGeom prst="rect">
             <a:avLst/>
@@ -25107,7 +25107,7 @@
         </p:blipFill>
         <p:spPr>
           <a:xfrm>
-            <a:off x="2748129" y="2117318"/>
+            <a:off x="2748129" y="2124456"/>
             <a:ext cx="3634154" cy="2190750"/>
           </a:xfrm>
           <a:prstGeom prst="rect">
@@ -25284,7 +25284,7 @@
           </p:nvPr>
         </p:nvGraphicFramePr>
         <p:xfrm>
-          <a:off x="1425766" y="4501521"/>
+          <a:off x="1425766" y="4337050"/>
           <a:ext cx="6278880" cy="3873500"/>
         </p:xfrm>
         <a:graphic>
@@ -26547,7 +26547,7 @@
         </p:nvSpPr>
         <p:spPr>
           <a:xfrm>
-            <a:off x="365760" y="4203071"/>
+            <a:off x="365760" y="4038600"/>
             <a:ext cx="8412480" cy="222250"/>
           </a:xfrm>
           <a:prstGeom prst="rect">
@@ -27258,7 +27258,7 @@
           </p:nvPr>
         </p:nvGraphicFramePr>
         <p:xfrm>
-          <a:off x="1649286" y="2141448"/>
+          <a:off x="1649286" y="2112010"/>
           <a:ext cx="5831840" cy="3873500"/>
         </p:xfrm>
         <a:graphic>
@@ -28349,7 +28349,7 @@
         </p:nvSpPr>
         <p:spPr>
           <a:xfrm>
-            <a:off x="365760" y="1842998"/>
+            <a:off x="365760" y="1813560"/>
             <a:ext cx="8412480" cy="222250"/>
           </a:xfrm>
           <a:prstGeom prst="rect">
@@ -28398,7 +28398,7 @@
         </p:nvSpPr>
         <p:spPr>
           <a:xfrm>
-            <a:off x="365760" y="3683048"/>
+            <a:off x="365760" y="3780610"/>
             <a:ext cx="8412480" cy="1575758"/>
           </a:xfrm>
           <a:prstGeom prst="rect">
@@ -28811,7 +28811,7 @@
           </p:nvPr>
         </p:nvGraphicFramePr>
         <p:xfrm>
-          <a:off x="1369886" y="3972807"/>
+          <a:off x="1369886" y="4106946"/>
           <a:ext cx="6390640" cy="3873500"/>
         </p:xfrm>
         <a:graphic>
@@ -29862,7 +29862,7 @@
         </p:nvSpPr>
         <p:spPr>
           <a:xfrm>
-            <a:off x="365760" y="3674357"/>
+            <a:off x="365760" y="3808496"/>
             <a:ext cx="8412480" cy="222250"/>
           </a:xfrm>
           <a:prstGeom prst="rect">
@@ -29911,8 +29911,8 @@
         </p:nvSpPr>
         <p:spPr>
           <a:xfrm>
-            <a:off x="365760" y="1842998"/>
-            <a:ext cx="8412480" cy="274320"/>
+            <a:off x="365760" y="1886712"/>
+            <a:ext cx="8412480" cy="201168"/>
           </a:xfrm>
           <a:prstGeom prst="rect">
             <a:avLst/>
@@ -29962,7 +29962,7 @@
         </p:blipFill>
         <p:spPr>
           <a:xfrm>
-            <a:off x="2425744" y="2117318"/>
+            <a:off x="2425744" y="2124456"/>
             <a:ext cx="4278923" cy="1345712"/>
           </a:xfrm>
           <a:prstGeom prst="rect">
@@ -30149,7 +30149,7 @@
           </p:nvPr>
         </p:nvGraphicFramePr>
         <p:xfrm>
-          <a:off x="1607376" y="2141448"/>
+          <a:off x="1607376" y="2112010"/>
           <a:ext cx="5915660" cy="3873500"/>
         </p:xfrm>
         <a:graphic>
@@ -31358,7 +31358,7 @@
         </p:nvSpPr>
         <p:spPr>
           <a:xfrm>
-            <a:off x="365760" y="1842998"/>
+            <a:off x="365760" y="1813560"/>
             <a:ext cx="8412480" cy="222250"/>
           </a:xfrm>
           <a:prstGeom prst="rect">
@@ -31407,7 +31407,7 @@
         </p:nvSpPr>
         <p:spPr>
           <a:xfrm>
-            <a:off x="365760" y="3971048"/>
+            <a:off x="365760" y="4068610"/>
             <a:ext cx="8412480" cy="1435556"/>
           </a:xfrm>
           <a:prstGeom prst="rect">

--- a/courses/ooad/sessions/s05.pptx
+++ b/courses/ooad/sessions/s05.pptx
@@ -565,21 +565,21 @@
             <a:pPr lvl="0"/>
             <a:r>
               <a:rPr lang="ko-KR" sz="1200"/>
-              <a:t>도메인 모델은 "03. 정적 모델 — 도메인 개념과 관계"의 것이다. 환불 규칙은 환불 ≤ 결제 금액, 출고 준비 중·출고됨은 배송 시스템의 상태라 주문 시스템 밖이다.</a:t>
+              <a:t>도메인 모델은 "세션 03. 정적 모델 — 도메인 개념과 관계"의 것이다. 환불 규칙은 환불 ≤ 결제 금액, 출고 준비 중·출고됨은 배송 시스템의 상태라 주문 시스템 밖이다.</a:t>
             </a:r>
           </a:p>
           <a:p>
             <a:pPr lvl="0"/>
             <a:r>
               <a:rPr lang="ko-KR" sz="1200"/>
-              <a:t>근거: "03. 정적 모델 — 도메인 개념과 관계"의 「상세화」·「패키지별 도메인 모델」, "04. 동적 모델 — 상호작용과 상태"의 「08. 상태 기계 다이어그램」의 「주문 상태 기계」.</a:t>
+              <a:t>근거: "세션 03. 정적 모델 — 도메인 개념과 관계"의 「상세화」·「패키지별 도메인 모델」, "세션 04. 동적 모델 — 상호작용과 상태"의 「08. 상태 기계 다이어그램」의 「주문 상태 기계」.</a:t>
             </a:r>
           </a:p>
           <a:p>
             <a:pPr lvl="0"/>
             <a:r>
               <a:rPr lang="ko-KR" sz="1200"/>
-              <a:t>결과가 분석 패키지와 같은 것은 우연이 아니다. "03. 정적 모델 — 도메인 개념과 관계"가 업무 의미로 묶었기 때문이다. 기술 계층으로 묶었다면 결과가 달랐을 것이다.</a:t>
+              <a:t>결과가 분석 패키지와 같은 것은 우연이 아니다. "세션 03. 정적 모델 — 도메인 개념과 관계"가 업무 의미로 묶었기 때문이다. 기술 계층으로 묶었다면 결과가 달랐을 것이다.</a:t>
             </a:r>
           </a:p>
           <a:p>
@@ -661,7 +661,7 @@
             <a:pPr lvl="0"/>
             <a:r>
               <a:rPr lang="ko-KR" sz="1200"/>
-              <a:t>외부 시스템 목록과 동기·비동기는 과정의 공통 전제와 같다("02. 요구 분석과 유스케이스"의 「44. 정제된 SSD」). 동기·비동기의 기준은 반환값이 아니라 완료를 기다리는가다("04. 동적 모델 — 상호작용과 상태"의 「12. 동적 모델에서 코드로」).</a:t>
+              <a:t>외부 시스템 목록과 동기·비동기는 과정의 공통 전제와 같다("세션 02. 요구 분석과 유스케이스"의 「44. 정제된 SSD」). 동기·비동기의 기준은 반환값이 아니라 완료를 기다리는가다("세션 04. 동적 모델 — 상호작용과 상태"의 「12. 동적 모델에서 코드로」).</a:t>
             </a:r>
           </a:p>
           <a:p>
@@ -689,7 +689,7 @@
             <a:pPr lvl="0"/>
             <a:r>
               <a:rPr lang="ko-KR" sz="1200"/>
-              <a:t>상품 시스템의 판매가도 주문 시점에 주문 항목의 단가로 옮겨 확정한다("03. 정적 모델 — 도메인 개념과 관계"의 현재 값과 확정 값).</a:t>
+              <a:t>상품 시스템의 판매가도 주문 시점에 주문 항목의 단가로 옮겨 확정한다("세션 03. 정적 모델 — 도메인 개념과 관계"의 현재 값과 확정 값).</a:t>
             </a:r>
           </a:p>
         </p:txBody>
@@ -982,7 +982,7 @@
             <a:pPr lvl="0"/>
             <a:r>
               <a:rPr lang="ko-KR" sz="1200"/>
-              <a:t>이 구조에 이름을 붙이는 일(아키텍처 스타일)은 "13. OOAD에서 전문영역으로 — Architecture · DDD · MSA"에서 한다. 구조의 이름보다 경계와 방향의 판단 근거를 먼저 확인한다.</a:t>
+              <a:t>이 구조에 이름을 붙이는 일(아키텍처 스타일)은 "세션 13. OOAD에서 전문영역으로 — Architecture · DDD · MSA"에서 한다. 구조의 이름보다 경계와 방향의 판단 근거를 먼저 확인한다.</a:t>
             </a:r>
           </a:p>
           <a:p>
@@ -996,7 +996,7 @@
             <a:pPr lvl="0"/>
             <a:r>
               <a:rPr lang="ko-KR" sz="1200"/>
-              <a:t>인터페이스는 오퍼레이션 이름 수준이다. 매개변수와 계약의 정제는 "07. 책임·협력·계약"에서 한다.</a:t>
+              <a:t>인터페이스는 오퍼레이션 이름 수준이다. 매개변수와 계약의 정제는 "세션 07. 책임·협력·계약"에서 한다.</a:t>
             </a:r>
           </a:p>
         </p:txBody>
@@ -1064,7 +1064,7 @@
             <a:pPr lvl="0"/>
             <a:r>
               <a:rPr lang="ko-KR" sz="1200"/>
-              <a:t>클래스 수준의 원칙(SRP·OCP·LSP·ISP·DIP)은 "07. 책임·협력·계약"·"08. 변화 대응과 변이 설계"에서 다룬다. 패키지 원칙은 그 위의 묶음과 방향을 다룬다.</a:t>
+              <a:t>클래스 수준의 원칙(SRP·OCP·LSP·ISP·DIP)은 "세션 07. 책임·협력·계약"·"세션 08. 변화 대응과 변이 설계"에서 다룬다. 패키지 원칙은 그 위의 묶음과 방향을 다룬다.</a:t>
             </a:r>
           </a:p>
         </p:txBody>
@@ -1125,7 +1125,7 @@
             <a:pPr lvl="0"/>
             <a:r>
               <a:rPr lang="ko-KR" sz="1200"/>
-              <a:t>시스템 전체의 경계(무엇이 주문 시스템의 책임인가)는 "02. 요구 분석과 유스케이스"에서 정했다. 구조적 경계는 주문 시스템 안의 책임 범위를 다룬다. 클래스 수준의 책임 배치는 "06. 분석 모델에서 설계 모델로"·"07. 책임·협력·계약"에서 다룬다.</a:t>
+              <a:t>시스템 전체의 경계(무엇이 주문 시스템의 책임인가)는 "세션 02. 요구 분석과 유스케이스"에서 정했다. 구조적 경계는 주문 시스템 안의 책임 범위를 다룬다. 클래스 수준의 책임 배치는 "세션 06. 분석 모델에서 설계 모델로"·"세션 07. 책임·협력·계약"에서 다룬다.</a:t>
             </a:r>
           </a:p>
         </p:txBody>
@@ -1261,14 +1261,14 @@
             <a:pPr lvl="0"/>
             <a:r>
               <a:rPr lang="ko-KR" sz="1200"/>
-              <a:t>결합도·응집도는 Stevens·Myers·Constantine의 "Structured Design"(IBM Systems Journal, 1974)이 모듈 설계의 기준으로 제시한 개념이다. 변경 파급 검토는 이를 패키지 수준에 적용한다. 객체 수준의 결합·응집은 "07. 책임·협력·계약"에서 다룬다.</a:t>
+              <a:t>결합도·응집도는 Stevens·Myers·Constantine의 "Structured Design"(IBM Systems Journal, 1974)이 모듈 설계의 기준으로 제시한 개념이다. 변경 파급 검토는 이를 패키지 수준에 적용한다. 객체 수준의 결합·응집은 "세션 07. 책임·협력·계약"에서 다룬다.</a:t>
             </a:r>
           </a:p>
           <a:p>
             <a:pPr lvl="0"/>
             <a:r>
               <a:rPr lang="ko-KR" sz="1200"/>
-              <a:t>결제 전 취소는 "04. 동적 모델 — 상호작용과 상태"의 「08. 상태 기계 다이어그램」의 「가드와 금지된 전이」에서 미정으로 남긴 요구다. 정해지면 주문 경계 안에서 끝난다.</a:t>
+              <a:t>결제 전 취소는 "세션 04. 동적 모델 — 상호작용과 상태"의 「08. 상태 기계 다이어그램」의 「가드와 금지된 전이」에서 미정으로 남긴 요구다. 정해지면 주문 경계 안에서 끝난다.</a:t>
             </a:r>
           </a:p>
           <a:p>
@@ -1343,7 +1343,7 @@
             <a:pPr lvl="0"/>
             <a:r>
               <a:rPr lang="ko-KR" sz="1200"/>
-              <a:t>이 제약은 "06. 분석 모델에서 설계 모델로"·"07. 책임·협력·계약"에서 클래스와 책임을 정할 때의 입력이다.</a:t>
+              <a:t>이 제약은 "세션 06. 분석 모델에서 설계 모델로"·"세션 07. 책임·협력·계약"에서 클래스와 책임을 정할 때의 입력이다.</a:t>
             </a:r>
           </a:p>
           <a:p>
@@ -1418,14 +1418,14 @@
             <a:pPr lvl="0"/>
             <a:r>
               <a:rPr lang="ko-KR" sz="1200"/>
-              <a:t>코드는 모두 code/s05/의 패키지별 원본에서 발췌했으며, 컴파일·실행해 확인한다. "04. 동적 모델 — 상호작용과 상태"의 분석 코드 배송시스템·출고중단을요청한다가 용어집의 영문명 DeliveryGateway·requestDispatchStop이 되었다. 이 세션에서는 그 인터페이스가 delivery 패키지에 놓인다.</a:t>
+              <a:t>코드는 모두 code/s05/의 패키지별 원본에서 발췌했으며, 컴파일·실행해 확인한다. "세션 04. 동적 모델 — 상호작용과 상태"의 분석 코드 배송시스템·출고중단을요청한다가 용어집의 영문명 DeliveryGateway·requestDispatchStop이 되었다. 이 세션에서는 그 인터페이스가 delivery 패키지에 놓인다.</a:t>
             </a:r>
           </a:p>
           <a:p>
             <a:pPr lvl="0"/>
             <a:r>
               <a:rPr lang="ko-KR" sz="1200"/>
-              <a:t>코드가 보장하는 것은 import의 방향뿐이다. 클래스의 책임과 협력은 "07. 책임·협력·계약"에서 정한다.</a:t>
+              <a:t>코드가 보장하는 것은 import의 방향뿐이다. 클래스의 책임과 협력은 "세션 07. 책임·협력·계약"에서 정한다.</a:t>
             </a:r>
           </a:p>
         </p:txBody>
@@ -1493,7 +1493,7 @@
             <a:pPr lvl="0"/>
             <a:r>
               <a:rPr lang="ko-KR" sz="1200"/>
-              <a:t>요청의 순서(출고 중단 → 환불)는 "04. 동적 모델 — 상호작용과 상태"의 테스트와 같다. 경계를 나누고 이름을 영문으로 바꿔도 업무의 의미는 그대로다 — CANCELLING은 용어집의 "취소 처리 중"이다.</a:t>
+              <a:t>요청의 순서(출고 중단 → 환불)는 "세션 04. 동적 모델 — 상호작용과 상태"의 테스트와 같다. 경계를 나누고 이름을 영문으로 바꿔도 업무의 의미는 그대로다 — CANCELLING은 용어집의 "취소 처리 중"이다.</a:t>
             </a:r>
           </a:p>
         </p:txBody>
@@ -1568,7 +1568,7 @@
             <a:pPr lvl="0"/>
             <a:r>
               <a:rPr lang="ko-KR" sz="1200"/>
-              <a:t>통보를 받는 방식(메시지 큐·웹훅 등)은 생략했다. 전달 기술은 "10. 기술 제약과 도메인 의미 보존"에서 다룬다.</a:t>
+              <a:t>통보를 받는 방식(메시지 큐·웹훅 등)은 생략했다. 전달 기술은 "세션 10. 기술 제약과 도메인 의미 보존"에서 다룬다.</a:t>
             </a:r>
           </a:p>
         </p:txBody>
@@ -1636,7 +1636,7 @@
             <a:pPr lvl="0"/>
             <a:r>
               <a:rPr lang="ko-KR" sz="1200"/>
-              <a:t>경계 안의 구성 방식은 "13. OOAD에서 전문영역으로 — Architecture · DDD · MSA"의 포트와 어댑터로 이어진다.</a:t>
+              <a:t>경계 안의 구성 방식은 "세션 13. OOAD에서 전문영역으로 — Architecture · DDD · MSA"의 포트와 어댑터로 이어진다.</a:t>
             </a:r>
           </a:p>
         </p:txBody>
@@ -1772,7 +1772,7 @@
             <a:pPr lvl="0"/>
             <a:r>
               <a:rPr lang="ko-KR" sz="1200"/>
-              <a:t>"04. 동적 모델 — 상호작용과 상태"에서 출고 준비 중·출고됨을 주문 상태에 넣지 않은 것과 같은 판단이다.</a:t>
+              <a:t>"세션 04. 동적 모델 — 상호작용과 상태"에서 출고 준비 중·출고됨을 주문 상태에 넣지 않은 것과 같은 판단이다.</a:t>
             </a:r>
           </a:p>
           <a:p>
@@ -1840,14 +1840,14 @@
             <a:pPr lvl="0"/>
             <a:r>
               <a:rPr lang="ko-KR" sz="1200"/>
-              <a:t>입력 — 요구("02. 요구 분석과 유스케이스")의 시스템 이벤트·오퍼레이션 계약·외부 시스템, 정적 모델("03. 정적 모델 — 도메인 개념과 관계")의 개념·연관·분석 패키지, 동적 모델("04. 동적 모델 — 상호작용과 상태")의 상호작용·상태의 소유·요청과 통보.</a:t>
+              <a:t>입력 — 요구("세션 02. 요구 분석과 유스케이스")의 시스템 이벤트·오퍼레이션 계약·외부 시스템, 정적 모델("세션 03. 정적 모델 — 도메인 개념과 관계")의 개념·연관·분석 패키지, 동적 모델("세션 04. 동적 모델 — 상호작용과 상태")의 상호작용·상태의 소유·요청과 통보.</a:t>
             </a:r>
           </a:p>
           <a:p>
             <a:pPr lvl="0"/>
             <a:r>
               <a:rPr lang="ko-KR" sz="1200"/>
-              <a:t>"04. 동적 모델 — 상호작용과 상태"는 주문 시스템이 외부에 보내는 요청과 받는 통보를 남겼다. 구조 설계는 누가 외부 시스템을 알고 통보를 받는지 결정한다.</a:t>
+              <a:t>"세션 04. 동적 모델 — 상호작용과 상태"는 주문 시스템이 외부에 보내는 요청과 받는 통보를 남겼다. 구조 설계는 누가 외부 시스템을 알고 통보를 받는지 결정한다.</a:t>
             </a:r>
           </a:p>
           <a:p>
@@ -2194,7 +2194,7 @@
             <a:pPr lvl="0"/>
             <a:r>
               <a:rPr lang="ko-KR" sz="1200"/>
-              <a:t>인터페이스의 매개변수와 객체 책임은 "06. 분석 모델에서 설계 모델로"와 "07. 책임·협력·계약"에서 정제한다.</a:t>
+              <a:t>인터페이스의 매개변수와 객체 책임은 "세션 06. 분석 모델에서 설계 모델로"와 "세션 07. 책임·협력·계약"에서 정제한다.</a:t>
             </a:r>
           </a:p>
         </p:txBody>
@@ -2323,7 +2323,7 @@
             <a:pPr lvl="0"/>
             <a:r>
               <a:rPr lang="ko-KR" sz="1200"/>
-              <a:t>도식은 "03. 정적 모델 — 도메인 개념과 관계"의 「15. 패키지」의 「패키지별 도메인 모델」을 경계를 넘는 연관만 남겨 줄인 것이다(장바구니 항목·환불은 생략). 분석 패키지의 기준(주제 영역·클래스 계층·유스케이스·강한 연관)은 "03. 정적 모델 — 도메인 개념과 관계"의 「15. 패키지」의 「패키지 기준」에서 다뤘다.</a:t>
+              <a:t>도식은 "세션 03. 정적 모델 — 도메인 개념과 관계"의 「15. 패키지」의 「패키지별 도메인 모델」을 경계를 넘는 연관만 남겨 줄인 것이다(장바구니 항목·환불은 생략). 분석 패키지의 기준(주제 영역·클래스 계층·유스케이스·강한 연관)은 "세션 03. 정적 모델 — 도메인 개념과 관계"의 「15. 패키지」의 「패키지 기준」에서 다뤘다.</a:t>
             </a:r>
           </a:p>
           <a:p>
@@ -2405,14 +2405,14 @@
             <a:pPr lvl="0"/>
             <a:r>
               <a:rPr lang="ko-KR" sz="1200"/>
-              <a:t>"01. OOAD 개요"의 「취소 판단의 책임」에서 경계를 "함께 변경되어야 할 상태와 행위의 묶음"으로 미리 보였다. 구조적 경계는 그 판단을 주문 시스템 안에 적용한다.</a:t>
+              <a:t>"세션 01. OOAD 개요"의 「취소 판단의 책임」에서 경계를 "함께 변경되어야 할 상태와 행위의 묶음"으로 미리 보였다. 구조적 경계는 그 판단을 주문 시스템 안에 적용한다.</a:t>
             </a:r>
           </a:p>
           <a:p>
             <a:pPr lvl="0"/>
             <a:r>
               <a:rPr lang="ko-KR" sz="1200"/>
-              <a:t>구조적 경계는 주문 시스템 안의 구조다. 여러 시스템으로 나누는 판단(서비스 경계)은 "13. OOAD에서 전문영역으로 — Architecture · DDD · MSA"에서 다룬다.</a:t>
+              <a:t>구조적 경계는 주문 시스템 안의 구조다. 여러 시스템으로 나누는 판단(서비스 경계)은 "세션 13. OOAD에서 전문영역으로 — Architecture · DDD · MSA"에서 다룬다.</a:t>
             </a:r>
           </a:p>
         </p:txBody>
@@ -2548,7 +2548,7 @@
             <a:pPr lvl="0"/>
             <a:r>
               <a:rPr lang="ko-KR" sz="1200"/>
-              <a:t>용어집과 영문명은 "02. 요구 분석과 유스케이스"의 「18. 용어집」에서 정의하고 "03. 정적 모델 — 도메인 개념과 관계"의 「13. 용어 정렬」의 「용어집 정제」에서 정제했다. 전체 목록과 명명 규칙은 과정 설계의 "영한 용어집과 명명 규칙"이 원천이다.</a:t>
+              <a:t>용어집과 영문명은 "세션 02. 요구 분석과 유스케이스"의 「18. 용어집」에서 정의하고 "세션 03. 정적 모델 — 도메인 개념과 관계"의 「13. 용어 정렬」의 「용어집 정제」에서 정제했다. 전체 목록과 명명 규칙은 과정 설계의 "영한 용어집과 명명 규칙"이 원천이다.</a:t>
             </a:r>
           </a:p>
           <a:p>
@@ -2637,7 +2637,7 @@
             <a:pPr lvl="0"/>
             <a:r>
               <a:rPr lang="ko-KR" sz="1200"/>
-              <a:t>"03. 정적 모델 — 도메인 개념과 관계"의 「15. 패키지」의 「패키지 표기」는 개념의 묶음까지 다뤘다. 패키지 다이어그램은 의존 화살표와 인터페이스를 더한다.</a:t>
+              <a:t>"세션 03. 정적 모델 — 도메인 개념과 관계"의 「15. 패키지」의 「패키지 표기」는 개념의 묶음까지 다뤘다. 패키지 다이어그램은 의존 화살표와 인터페이스를 더한다.</a:t>
             </a:r>
           </a:p>
         </p:txBody>
@@ -12973,7 +12973,7 @@
                 <a:latin typeface="맑은 고딕"/>
                 <a:ea typeface="맑은 고딕"/>
               </a:rPr>
-              <a:t>("07. 책임·협력·계약")</a:t>
+              <a:t>("세션 07. 책임·협력·계약")</a:t>
             </a:r>
             <a:r>
               <a:rPr sz="1600" b="0">
@@ -25284,8 +25284,8 @@
           </p:nvPr>
         </p:nvGraphicFramePr>
         <p:xfrm>
-          <a:off x="1425766" y="4337050"/>
-          <a:ext cx="6278880" cy="3873500"/>
+          <a:off x="1244156" y="4337050"/>
+          <a:ext cx="6642100" cy="3873500"/>
         </p:xfrm>
         <a:graphic>
           <a:graphicData uri="http://schemas.openxmlformats.org/drawingml/2006/table">
@@ -25294,7 +25294,7 @@
               <a:tblGrid>
                 <a:gridCol w="1087120"/>
                 <a:gridCol w="2819400"/>
-                <a:gridCol w="2372360"/>
+                <a:gridCol w="2735580"/>
               </a:tblGrid>
               <a:tr h="288000">
                 <a:tc>
@@ -25629,7 +25629,7 @@
                           <a:ea typeface="맑은 고딕" panose="020B0503020000020004" pitchFamily="34" charset="-127"/>
                           <a:cs typeface="맑은 고딕"/>
                         </a:rPr>
-                        <a:t>"02. 요구 분석과 유스케이스"</a:t>
+                        <a:t>"세션 02. 요구 분석과 유스케이스"</a:t>
                       </a:r>
                     </a:p>
                   </a:txBody>
@@ -25797,7 +25797,7 @@
                           <a:ea typeface="맑은 고딕" panose="020B0503020000020004" pitchFamily="34" charset="-127"/>
                           <a:cs typeface="맑은 고딕"/>
                         </a:rPr>
-                        <a:t>"05. 구조적 경계와 의존성"</a:t>
+                        <a:t>"세션 05. 구조적 경계와 의존성"</a:t>
                       </a:r>
                     </a:p>
                   </a:txBody>
@@ -25965,7 +25965,7 @@
                           <a:ea typeface="맑은 고딕" panose="020B0503020000020004" pitchFamily="34" charset="-127"/>
                           <a:cs typeface="맑은 고딕"/>
                         </a:rPr>
-                        <a:t>"05. 구조적 경계와 의존성"</a:t>
+                        <a:t>"세션 05. 구조적 경계와 의존성"</a:t>
                       </a:r>
                     </a:p>
                   </a:txBody>
@@ -26133,7 +26133,7 @@
                           <a:ea typeface="맑은 고딕" panose="020B0503020000020004" pitchFamily="34" charset="-127"/>
                           <a:cs typeface="맑은 고딕"/>
                         </a:rPr>
-                        <a:t>"07. 책임·협력·계약"</a:t>
+                        <a:t>"세션 07. 책임·협력·계약"</a:t>
                       </a:r>
                     </a:p>
                   </a:txBody>

--- a/courses/ooad/sessions/s05.pptx
+++ b/courses/ooad/sessions/s05.pptx
@@ -19949,8 +19949,8 @@
         </p:blipFill>
         <p:spPr>
           <a:xfrm>
-            <a:off x="3649663" y="3099816"/>
-            <a:ext cx="1844675" cy="2700338"/>
+            <a:off x="3650531" y="3099816"/>
+            <a:ext cx="1842939" cy="2697796"/>
           </a:xfrm>
           <a:prstGeom prst="rect">
             <a:avLst/>
@@ -21953,7 +21953,7 @@
                 <a:latin typeface="맑은 고딕"/>
                 <a:ea typeface="맑은 고딕"/>
               </a:rPr>
-              <a:t> 객체 설계 전에 명시하고 코드·테스트·변경 시나리오로 확인한다</a:t>
+              <a:t> 객체 설계 전에 명시하고 코드·테스트로 확인한다</a:t>
             </a:r>
           </a:p>
           <a:p>

--- a/courses/ooad/sessions/s05.pptx
+++ b/courses/ooad/sessions/s05.pptx
@@ -4825,6 +4825,16 @@
               <a:buChar char=""/>
             </a:pPr>
             <a:r>
+              <a:rPr sz="1600" b="1">
+                <a:solidFill>
+                  <a:srgbClr val="000000"/>
+                </a:solidFill>
+                <a:latin typeface="맑은 고딕"/>
+                <a:ea typeface="맑은 고딕"/>
+              </a:rPr>
+              <a:t>함께 바뀌는</a:t>
+            </a:r>
+            <a:r>
               <a:rPr sz="1600" b="0">
                 <a:solidFill>
                   <a:srgbClr val="000000"/>
@@ -4832,27 +4842,7 @@
                 <a:latin typeface="맑은 고딕"/>
                 <a:ea typeface="맑은 고딕"/>
               </a:rPr>
-              <a:t>"</a:t>
-            </a:r>
-            <a:r>
-              <a:rPr sz="1600" b="1">
-                <a:solidFill>
-                  <a:srgbClr val="000000"/>
-                </a:solidFill>
-                <a:latin typeface="맑은 고딕"/>
-                <a:ea typeface="맑은 고딕"/>
-              </a:rPr>
-              <a:t>함께 바뀌는</a:t>
-            </a:r>
-            <a:r>
-              <a:rPr sz="1600" b="0">
-                <a:solidFill>
-                  <a:srgbClr val="000000"/>
-                </a:solidFill>
-                <a:latin typeface="맑은 고딕"/>
-                <a:ea typeface="맑은 고딕"/>
-              </a:rPr>
-              <a:t> 클래스는 함께 둔다"</a:t>
+              <a:t> 클래스는 함께 둔다</a:t>
             </a:r>
             <a:r>
               <a:rPr sz="1000" b="0">
@@ -4941,6 +4931,16 @@
               <a:buChar char=""/>
             </a:pPr>
             <a:r>
+              <a:rPr sz="1600" b="1">
+                <a:solidFill>
+                  <a:srgbClr val="000000"/>
+                </a:solidFill>
+                <a:latin typeface="맑은 고딕"/>
+                <a:ea typeface="맑은 고딕"/>
+              </a:rPr>
+              <a:t>함께 재사용되지 않는</a:t>
+            </a:r>
+            <a:r>
               <a:rPr sz="1600" b="0">
                 <a:solidFill>
                   <a:srgbClr val="000000"/>
@@ -4948,27 +4948,7 @@
                 <a:latin typeface="맑은 고딕"/>
                 <a:ea typeface="맑은 고딕"/>
               </a:rPr>
-              <a:t>"</a:t>
-            </a:r>
-            <a:r>
-              <a:rPr sz="1600" b="1">
-                <a:solidFill>
-                  <a:srgbClr val="000000"/>
-                </a:solidFill>
-                <a:latin typeface="맑은 고딕"/>
-                <a:ea typeface="맑은 고딕"/>
-              </a:rPr>
-              <a:t>함께 재사용되지 않는</a:t>
-            </a:r>
-            <a:r>
-              <a:rPr sz="1600" b="0">
-                <a:solidFill>
-                  <a:srgbClr val="000000"/>
-                </a:solidFill>
-                <a:latin typeface="맑은 고딕"/>
-                <a:ea typeface="맑은 고딕"/>
-              </a:rPr>
-              <a:t> 클래스는 함께 묶지 않는다"</a:t>
+              <a:t> 클래스는 함께 묶지 않는다</a:t>
             </a:r>
             <a:r>
               <a:rPr sz="1000" b="0">
@@ -8206,6 +8186,16 @@
               <a:buChar char=""/>
             </a:pPr>
             <a:r>
+              <a:rPr sz="1800" b="1">
+                <a:solidFill>
+                  <a:srgbClr val="000000"/>
+                </a:solidFill>
+                <a:latin typeface="맑은 고딕"/>
+                <a:ea typeface="맑은 고딕"/>
+              </a:rPr>
+              <a:t>안정된 방향</a:t>
+            </a:r>
+            <a:r>
               <a:rPr sz="1800" b="0">
                 <a:solidFill>
                   <a:srgbClr val="000000"/>
@@ -8213,27 +8203,7 @@
                 <a:latin typeface="맑은 고딕"/>
                 <a:ea typeface="맑은 고딕"/>
               </a:rPr>
-              <a:t>"</a:t>
-            </a:r>
-            <a:r>
-              <a:rPr sz="1800" b="1">
-                <a:solidFill>
-                  <a:srgbClr val="000000"/>
-                </a:solidFill>
-                <a:latin typeface="맑은 고딕"/>
-                <a:ea typeface="맑은 고딕"/>
-              </a:rPr>
-              <a:t>안정된 방향</a:t>
-            </a:r>
-            <a:r>
-              <a:rPr sz="1800" b="0">
-                <a:solidFill>
-                  <a:srgbClr val="000000"/>
-                </a:solidFill>
-                <a:latin typeface="맑은 고딕"/>
-                <a:ea typeface="맑은 고딕"/>
-              </a:rPr>
-              <a:t>으로 의존하라"</a:t>
+              <a:t>으로 의존한다</a:t>
             </a:r>
             <a:r>
               <a:rPr sz="1000" b="0">
@@ -8253,27 +8223,7 @@
                 <a:latin typeface="맑은 고딕"/>
                 <a:ea typeface="맑은 고딕"/>
               </a:rPr>
-              <a:t>"Depend in the direction of stability."</a:t>
-            </a:r>
-            <a:r>
-              <a:rPr sz="1000" b="0">
-                <a:solidFill>
-                  <a:srgbClr val="000000"/>
-                </a:solidFill>
-                <a:latin typeface="맑은 고딕"/>
-                <a:ea typeface="맑은 고딕"/>
-              </a:rPr>
-              <a:t>, </a:t>
-            </a:r>
-            <a:r>
-              <a:rPr sz="1000" b="0">
-                <a:solidFill>
-                  <a:srgbClr val="000000"/>
-                </a:solidFill>
-                <a:latin typeface="맑은 고딕"/>
-                <a:ea typeface="맑은 고딕"/>
-              </a:rPr>
-              <a:t>[Martin 2000]</a:t>
+              <a:t>"Depend in the direction of stability.", [Martin 2000]</a:t>
             </a:r>
           </a:p>
           <a:p>
@@ -8803,7 +8753,7 @@
                 <a:latin typeface="맑은 고딕"/>
                 <a:ea typeface="맑은 고딕"/>
               </a:rPr>
-              <a:t>"패키지 사이의 의존은 </a:t>
+              <a:t>패키지 사이의 의존은 </a:t>
             </a:r>
             <a:r>
               <a:rPr sz="1800" b="1">
@@ -8823,7 +8773,7 @@
                 <a:latin typeface="맑은 고딕"/>
                 <a:ea typeface="맑은 고딕"/>
               </a:rPr>
-              <a:t>을 이루어서는 안 된다"</a:t>
+              <a:t>을 이루어서는 안 된다</a:t>
             </a:r>
             <a:r>
               <a:rPr sz="1000" b="0">
@@ -8843,27 +8793,7 @@
                 <a:latin typeface="맑은 고딕"/>
                 <a:ea typeface="맑은 고딕"/>
               </a:rPr>
-              <a:t>"The dependencies betwen packages must not form cycles."</a:t>
-            </a:r>
-            <a:r>
-              <a:rPr sz="1000" b="0">
-                <a:solidFill>
-                  <a:srgbClr val="000000"/>
-                </a:solidFill>
-                <a:latin typeface="맑은 고딕"/>
-                <a:ea typeface="맑은 고딕"/>
-              </a:rPr>
-              <a:t>, </a:t>
-            </a:r>
-            <a:r>
-              <a:rPr sz="1000" b="0">
-                <a:solidFill>
-                  <a:srgbClr val="000000"/>
-                </a:solidFill>
-                <a:latin typeface="맑은 고딕"/>
-                <a:ea typeface="맑은 고딕"/>
-              </a:rPr>
-              <a:t>[Martin 2000]</a:t>
+              <a:t>"The dependencies betwen packages must not form cycles.", [Martin 2000]</a:t>
             </a:r>
           </a:p>
           <a:p>
@@ -9057,6 +8987,16 @@
               <a:buChar char="l"/>
             </a:pPr>
             <a:r>
+              <a:rPr sz="1400" b="1">
+                <a:solidFill>
+                  <a:srgbClr val="000000"/>
+                </a:solidFill>
+                <a:latin typeface="맑은 고딕"/>
+                <a:ea typeface="맑은 고딕"/>
+              </a:rPr>
+              <a:t>추상</a:t>
+            </a:r>
+            <a:r>
               <a:rPr sz="1400" b="0">
                 <a:solidFill>
                   <a:srgbClr val="000000"/>
@@ -9064,27 +9004,7 @@
                 <a:latin typeface="맑은 고딕"/>
                 <a:ea typeface="맑은 고딕"/>
               </a:rPr>
-              <a:t>"</a:t>
-            </a:r>
-            <a:r>
-              <a:rPr sz="1400" b="1">
-                <a:solidFill>
-                  <a:srgbClr val="000000"/>
-                </a:solidFill>
-                <a:latin typeface="맑은 고딕"/>
-                <a:ea typeface="맑은 고딕"/>
-              </a:rPr>
-              <a:t>추상</a:t>
-            </a:r>
-            <a:r>
-              <a:rPr sz="1400" b="0">
-                <a:solidFill>
-                  <a:srgbClr val="000000"/>
-                </a:solidFill>
-                <a:latin typeface="맑은 고딕"/>
-                <a:ea typeface="맑은 고딕"/>
-              </a:rPr>
-              <a:t>에 의존하라. 구체에 의존하지 마라"</a:t>
+              <a:t>에 의존하고 구체에 의존하지 않는다</a:t>
             </a:r>
             <a:r>
               <a:rPr sz="1000" b="0">
@@ -9927,6 +9847,16 @@
               <a:buChar char=""/>
             </a:pPr>
             <a:r>
+              <a:rPr sz="1800" b="1">
+                <a:solidFill>
+                  <a:srgbClr val="000000"/>
+                </a:solidFill>
+                <a:latin typeface="맑은 고딕"/>
+                <a:ea typeface="맑은 고딕"/>
+              </a:rPr>
+              <a:t>안정된 패키지</a:t>
+            </a:r>
+            <a:r>
               <a:rPr sz="1800" b="0">
                 <a:solidFill>
                   <a:srgbClr val="000000"/>
@@ -9934,27 +9864,7 @@
                 <a:latin typeface="맑은 고딕"/>
                 <a:ea typeface="맑은 고딕"/>
               </a:rPr>
-              <a:t>"</a:t>
-            </a:r>
-            <a:r>
-              <a:rPr sz="1800" b="1">
-                <a:solidFill>
-                  <a:srgbClr val="000000"/>
-                </a:solidFill>
-                <a:latin typeface="맑은 고딕"/>
-                <a:ea typeface="맑은 고딕"/>
-              </a:rPr>
-              <a:t>안정된 패키지</a:t>
-            </a:r>
-            <a:r>
-              <a:rPr sz="1800" b="0">
-                <a:solidFill>
-                  <a:srgbClr val="000000"/>
-                </a:solidFill>
-                <a:latin typeface="맑은 고딕"/>
-                <a:ea typeface="맑은 고딕"/>
-              </a:rPr>
-              <a:t>는 추상 패키지여야 한다"</a:t>
+              <a:t>는 추상 패키지여야 한다</a:t>
             </a:r>
             <a:r>
               <a:rPr sz="1000" b="0">
@@ -9974,27 +9884,7 @@
                 <a:latin typeface="맑은 고딕"/>
                 <a:ea typeface="맑은 고딕"/>
               </a:rPr>
-              <a:t>"Stable packages should be abstract packages."</a:t>
-            </a:r>
-            <a:r>
-              <a:rPr sz="1000" b="0">
-                <a:solidFill>
-                  <a:srgbClr val="000000"/>
-                </a:solidFill>
-                <a:latin typeface="맑은 고딕"/>
-                <a:ea typeface="맑은 고딕"/>
-              </a:rPr>
-              <a:t>, </a:t>
-            </a:r>
-            <a:r>
-              <a:rPr sz="1000" b="0">
-                <a:solidFill>
-                  <a:srgbClr val="000000"/>
-                </a:solidFill>
-                <a:latin typeface="맑은 고딕"/>
-                <a:ea typeface="맑은 고딕"/>
-              </a:rPr>
-              <a:t>[Martin 2000]</a:t>
+              <a:t>"Stable packages should be abstract packages.", [Martin 2000]</a:t>
             </a:r>
           </a:p>
           <a:p>
@@ -12797,7 +12687,7 @@
                 <a:latin typeface="맑은 고딕"/>
                 <a:ea typeface="맑은 고딕"/>
               </a:rPr>
-              <a:t>"컴포넌트 구조는 </a:t>
+              <a:t>컴포넌트 구조는 </a:t>
             </a:r>
             <a:r>
               <a:rPr sz="1800" b="1">
@@ -12817,7 +12707,7 @@
                 <a:latin typeface="맑은 고딕"/>
                 <a:ea typeface="맑은 고딕"/>
               </a:rPr>
-              <a:t>. 시스템에서 가장 먼저 설계하는 것이 아니라, 시스템이 자라고 바뀌면서 진화한다"</a:t>
+              <a:t> — 가장 먼저 설계하는 것이 아니라 시스템이 자라고 바뀌면서 진화한다</a:t>
             </a:r>
             <a:r>
               <a:rPr sz="1000" b="0">
@@ -12837,27 +12727,7 @@
                 <a:latin typeface="맑은 고딕"/>
                 <a:ea typeface="맑은 고딕"/>
               </a:rPr>
-              <a:t>"The component structure cannot be designed from the top down. It is not one of the first things about the system that is designed, but rather evolves as the system grows and changes."</a:t>
-            </a:r>
-            <a:r>
-              <a:rPr sz="1000" b="0">
-                <a:solidFill>
-                  <a:srgbClr val="000000"/>
-                </a:solidFill>
-                <a:latin typeface="맑은 고딕"/>
-                <a:ea typeface="맑은 고딕"/>
-              </a:rPr>
-              <a:t>, </a:t>
-            </a:r>
-            <a:r>
-              <a:rPr sz="1000" b="0">
-                <a:solidFill>
-                  <a:srgbClr val="000000"/>
-                </a:solidFill>
-                <a:latin typeface="맑은 고딕"/>
-                <a:ea typeface="맑은 고딕"/>
-              </a:rPr>
-              <a:t>[Martin 2018]</a:t>
+              <a:t>"The component structure cannot be designed from the top down. It is not one of the first things about the system that is designed, but rather evolves as the system grows and changes.", [Martin 2018]</a:t>
             </a:r>
           </a:p>
           <a:p>
@@ -26878,7 +26748,7 @@
                 <a:latin typeface="맑은 고딕"/>
                 <a:ea typeface="맑은 고딕"/>
               </a:rPr>
-              <a:t>"의존은 공급자를 바꾸면 클라이언트 요소가 영향을 받을 수 있는, 모델 요소 사이의 </a:t>
+              <a:t>의존은 공급자를 바꾸면 클라이언트 요소가 영향을 받을 수 있는 모델 요소 사이의 </a:t>
             </a:r>
             <a:r>
               <a:rPr sz="1800" b="1">
@@ -26898,7 +26768,7 @@
                 <a:latin typeface="맑은 고딕"/>
                 <a:ea typeface="맑은 고딕"/>
               </a:rPr>
-              <a:t> 관계다"</a:t>
+              <a:t> 관계다</a:t>
             </a:r>
             <a:r>
               <a:rPr sz="1000" b="0">
@@ -26918,27 +26788,7 @@
                 <a:latin typeface="맑은 고딕"/>
                 <a:ea typeface="맑은 고딕"/>
               </a:rPr>
-              <a:t>"A Dependency signifies a supplier/client relationship between model elements where the modification of a supplier may impact the client model elements."</a:t>
-            </a:r>
-            <a:r>
-              <a:rPr sz="1000" b="0">
-                <a:solidFill>
-                  <a:srgbClr val="000000"/>
-                </a:solidFill>
-                <a:latin typeface="맑은 고딕"/>
-                <a:ea typeface="맑은 고딕"/>
-              </a:rPr>
-              <a:t>, </a:t>
-            </a:r>
-            <a:r>
-              <a:rPr sz="1000" b="0">
-                <a:solidFill>
-                  <a:srgbClr val="000000"/>
-                </a:solidFill>
-                <a:latin typeface="맑은 고딕"/>
-                <a:ea typeface="맑은 고딕"/>
-              </a:rPr>
-              <a:t>[OMG 2017]</a:t>
+              <a:t>"A Dependency signifies a supplier/client relationship between model elements where the modification of a supplier may impact the client model elements.", [OMG 2017]</a:t>
             </a:r>
           </a:p>
           <a:p>

--- a/courses/ooad/sessions/s05.pptx
+++ b/courses/ooad/sessions/s05.pptx
@@ -8223,7 +8223,27 @@
                 <a:latin typeface="맑은 고딕"/>
                 <a:ea typeface="맑은 고딕"/>
               </a:rPr>
-              <a:t>"Depend in the direction of stability.", [Martin 2000]</a:t>
+              <a:t>"Depend in the direction of stability."</a:t>
+            </a:r>
+            <a:r>
+              <a:rPr sz="1000" b="0">
+                <a:solidFill>
+                  <a:srgbClr val="000000"/>
+                </a:solidFill>
+                <a:latin typeface="맑은 고딕"/>
+                <a:ea typeface="맑은 고딕"/>
+              </a:rPr>
+              <a:t>, </a:t>
+            </a:r>
+            <a:r>
+              <a:rPr sz="1000" b="0">
+                <a:solidFill>
+                  <a:srgbClr val="000000"/>
+                </a:solidFill>
+                <a:latin typeface="맑은 고딕"/>
+                <a:ea typeface="맑은 고딕"/>
+              </a:rPr>
+              <a:t>[Martin 2000]</a:t>
             </a:r>
           </a:p>
           <a:p>
@@ -8793,7 +8813,27 @@
                 <a:latin typeface="맑은 고딕"/>
                 <a:ea typeface="맑은 고딕"/>
               </a:rPr>
-              <a:t>"The dependencies betwen packages must not form cycles.", [Martin 2000]</a:t>
+              <a:t>"The dependencies betwen packages must not form cycles."</a:t>
+            </a:r>
+            <a:r>
+              <a:rPr sz="1000" b="0">
+                <a:solidFill>
+                  <a:srgbClr val="000000"/>
+                </a:solidFill>
+                <a:latin typeface="맑은 고딕"/>
+                <a:ea typeface="맑은 고딕"/>
+              </a:rPr>
+              <a:t>, </a:t>
+            </a:r>
+            <a:r>
+              <a:rPr sz="1000" b="0">
+                <a:solidFill>
+                  <a:srgbClr val="000000"/>
+                </a:solidFill>
+                <a:latin typeface="맑은 고딕"/>
+                <a:ea typeface="맑은 고딕"/>
+              </a:rPr>
+              <a:t>[Martin 2000]</a:t>
             </a:r>
           </a:p>
           <a:p>
@@ -9884,7 +9924,27 @@
                 <a:latin typeface="맑은 고딕"/>
                 <a:ea typeface="맑은 고딕"/>
               </a:rPr>
-              <a:t>"Stable packages should be abstract packages.", [Martin 2000]</a:t>
+              <a:t>"Stable packages should be abstract packages."</a:t>
+            </a:r>
+            <a:r>
+              <a:rPr sz="1000" b="0">
+                <a:solidFill>
+                  <a:srgbClr val="000000"/>
+                </a:solidFill>
+                <a:latin typeface="맑은 고딕"/>
+                <a:ea typeface="맑은 고딕"/>
+              </a:rPr>
+              <a:t>, </a:t>
+            </a:r>
+            <a:r>
+              <a:rPr sz="1000" b="0">
+                <a:solidFill>
+                  <a:srgbClr val="000000"/>
+                </a:solidFill>
+                <a:latin typeface="맑은 고딕"/>
+                <a:ea typeface="맑은 고딕"/>
+              </a:rPr>
+              <a:t>[Martin 2000]</a:t>
             </a:r>
           </a:p>
           <a:p>
@@ -12727,7 +12787,27 @@
                 <a:latin typeface="맑은 고딕"/>
                 <a:ea typeface="맑은 고딕"/>
               </a:rPr>
-              <a:t>"The component structure cannot be designed from the top down. It is not one of the first things about the system that is designed, but rather evolves as the system grows and changes.", [Martin 2018]</a:t>
+              <a:t>"The component structure cannot be designed from the top down. It is not one of the first things about the system that is designed, but rather evolves as the system grows and changes."</a:t>
+            </a:r>
+            <a:r>
+              <a:rPr sz="1000" b="0">
+                <a:solidFill>
+                  <a:srgbClr val="000000"/>
+                </a:solidFill>
+                <a:latin typeface="맑은 고딕"/>
+                <a:ea typeface="맑은 고딕"/>
+              </a:rPr>
+              <a:t>, </a:t>
+            </a:r>
+            <a:r>
+              <a:rPr sz="1000" b="0">
+                <a:solidFill>
+                  <a:srgbClr val="000000"/>
+                </a:solidFill>
+                <a:latin typeface="맑은 고딕"/>
+                <a:ea typeface="맑은 고딕"/>
+              </a:rPr>
+              <a:t>[Martin 2018]</a:t>
             </a:r>
           </a:p>
           <a:p>
@@ -26788,7 +26868,27 @@
                 <a:latin typeface="맑은 고딕"/>
                 <a:ea typeface="맑은 고딕"/>
               </a:rPr>
-              <a:t>"A Dependency signifies a supplier/client relationship between model elements where the modification of a supplier may impact the client model elements.", [OMG 2017]</a:t>
+              <a:t>"A Dependency signifies a supplier/client relationship between model elements where the modification of a supplier may impact the client model elements."</a:t>
+            </a:r>
+            <a:r>
+              <a:rPr sz="1000" b="0">
+                <a:solidFill>
+                  <a:srgbClr val="000000"/>
+                </a:solidFill>
+                <a:latin typeface="맑은 고딕"/>
+                <a:ea typeface="맑은 고딕"/>
+              </a:rPr>
+              <a:t>, </a:t>
+            </a:r>
+            <a:r>
+              <a:rPr sz="1000" b="0">
+                <a:solidFill>
+                  <a:srgbClr val="000000"/>
+                </a:solidFill>
+                <a:latin typeface="맑은 고딕"/>
+                <a:ea typeface="맑은 고딕"/>
+              </a:rPr>
+              <a:t>[OMG 2017]</a:t>
             </a:r>
           </a:p>
           <a:p>
